--- a/exports/pptx/lessons/primary-module-05-dot-addition/day-07-make-a-game.pptx
+++ b/exports/pptx/lessons/primary-module-05-dot-addition/day-07-make-a-game.pptx
@@ -16,9 +16,11 @@
     <p:sldId id="264" r:id="rId10"/>
     <p:sldId id="265" r:id="rId11"/>
     <p:sldId id="266" r:id="rId12"/>
+    <p:sldId id="267" r:id="rId13"/>
+    <p:sldId id="268" r:id="rId14"/>
   </p:sldIdLst>
   <p:notesMasterIdLst>
-    <p:notesMasterId r:id="rId13"/>
+    <p:notesMasterId r:id="rId15"/>
   </p:notesMasterIdLst>
   <p:sldSz cx="9144000" cy="5143500"/>
   <p:notesSz cx="5143500" cy="9144000"/>
@@ -712,6 +714,182 @@
             <a:fld id="{F7021451-1387-4CA6-816F-3879F97B5CBC}" type="slidenum">
               <a:rPr lang="en-US"/>
               <a:t>11</a:t>
+            </a:fld>
+            <a:endParaRPr lang="en-US"/>
+          </a:p>
+        </p:txBody>
+      </p:sp>
+    </p:spTree>
+    <p:extLst>
+      <p:ext uri="{BB962C8B-B14F-4D97-AF65-F5344CB8AC3E}">
+        <p14:creationId xmlns:p14="http://schemas.microsoft.com/office/powerpoint/2010/main" val="1024086991"/>
+      </p:ext>
+    </p:extLst>
+  </p:cSld>
+  <p:clrMapOvr>
+    <a:masterClrMapping/>
+  </p:clrMapOvr>
+</p:notes>
+</file>
+
+<file path=ppt/notesSlides/notesSlide12.xml><?xml version="1.0" encoding="utf-8"?>
+<p:notes xmlns:a="http://schemas.openxmlformats.org/drawingml/2006/main" xmlns:r="http://schemas.openxmlformats.org/officeDocument/2006/relationships" xmlns:p="http://schemas.openxmlformats.org/presentationml/2006/main">
+  <p:cSld>
+    <p:spTree>
+      <p:nvGrpSpPr>
+        <p:cNvPr id="1" name=""/>
+        <p:cNvGrpSpPr/>
+        <p:nvPr/>
+      </p:nvGrpSpPr>
+      <p:grpSpPr>
+        <a:xfrm>
+          <a:off x="0" y="0"/>
+          <a:ext cx="0" cy="0"/>
+          <a:chOff x="0" y="0"/>
+          <a:chExt cx="0" cy="0"/>
+        </a:xfrm>
+      </p:grpSpPr>
+      <p:sp>
+        <p:nvSpPr>
+          <p:cNvPr id="2" name="Slide Image Placeholder 1"/>
+          <p:cNvSpPr>
+            <a:spLocks noGrp="1" noRot="1" noChangeAspect="1"/>
+          </p:cNvSpPr>
+          <p:nvPr>
+            <p:ph type="sldImg"/>
+          </p:nvPr>
+        </p:nvSpPr>
+        <p:spPr/>
+      </p:sp>
+      <p:sp>
+        <p:nvSpPr>
+          <p:cNvPr id="3" name="Notes Placeholder 2"/>
+          <p:cNvSpPr>
+            <a:spLocks noGrp="1"/>
+          </p:cNvSpPr>
+          <p:nvPr>
+            <p:ph type="body" idx="1"/>
+          </p:nvPr>
+        </p:nvSpPr>
+        <p:spPr/>
+        <p:txBody>
+          <a:bodyPr/>
+          <a:lstStyle/>
+          <a:p>
+            <a:r>
+              <a:rPr lang="en-US" dirty="0"/>
+              <a:t/>
+            </a:r>
+            <a:endParaRPr lang="en-US" dirty="0"/>
+          </a:p>
+        </p:txBody>
+      </p:sp>
+      <p:sp>
+        <p:nvSpPr>
+          <p:cNvPr id="4" name="Slide Number Placeholder 3"/>
+          <p:cNvSpPr>
+            <a:spLocks noGrp="1"/>
+          </p:cNvSpPr>
+          <p:nvPr>
+            <p:ph type="sldNum" sz="quarter" idx="10"/>
+          </p:nvPr>
+        </p:nvSpPr>
+        <p:spPr/>
+        <p:txBody>
+          <a:bodyPr/>
+          <a:lstStyle/>
+          <a:p>
+            <a:fld id="{F7021451-1387-4CA6-816F-3879F97B5CBC}" type="slidenum">
+              <a:rPr lang="en-US"/>
+              <a:t>12</a:t>
+            </a:fld>
+            <a:endParaRPr lang="en-US"/>
+          </a:p>
+        </p:txBody>
+      </p:sp>
+    </p:spTree>
+    <p:extLst>
+      <p:ext uri="{BB962C8B-B14F-4D97-AF65-F5344CB8AC3E}">
+        <p14:creationId xmlns:p14="http://schemas.microsoft.com/office/powerpoint/2010/main" val="1024086991"/>
+      </p:ext>
+    </p:extLst>
+  </p:cSld>
+  <p:clrMapOvr>
+    <a:masterClrMapping/>
+  </p:clrMapOvr>
+</p:notes>
+</file>
+
+<file path=ppt/notesSlides/notesSlide13.xml><?xml version="1.0" encoding="utf-8"?>
+<p:notes xmlns:a="http://schemas.openxmlformats.org/drawingml/2006/main" xmlns:r="http://schemas.openxmlformats.org/officeDocument/2006/relationships" xmlns:p="http://schemas.openxmlformats.org/presentationml/2006/main">
+  <p:cSld>
+    <p:spTree>
+      <p:nvGrpSpPr>
+        <p:cNvPr id="1" name=""/>
+        <p:cNvGrpSpPr/>
+        <p:nvPr/>
+      </p:nvGrpSpPr>
+      <p:grpSpPr>
+        <a:xfrm>
+          <a:off x="0" y="0"/>
+          <a:ext cx="0" cy="0"/>
+          <a:chOff x="0" y="0"/>
+          <a:chExt cx="0" cy="0"/>
+        </a:xfrm>
+      </p:grpSpPr>
+      <p:sp>
+        <p:nvSpPr>
+          <p:cNvPr id="2" name="Slide Image Placeholder 1"/>
+          <p:cNvSpPr>
+            <a:spLocks noGrp="1" noRot="1" noChangeAspect="1"/>
+          </p:cNvSpPr>
+          <p:nvPr>
+            <p:ph type="sldImg"/>
+          </p:nvPr>
+        </p:nvSpPr>
+        <p:spPr/>
+      </p:sp>
+      <p:sp>
+        <p:nvSpPr>
+          <p:cNvPr id="3" name="Notes Placeholder 2"/>
+          <p:cNvSpPr>
+            <a:spLocks noGrp="1"/>
+          </p:cNvSpPr>
+          <p:nvPr>
+            <p:ph type="body" idx="1"/>
+          </p:nvPr>
+        </p:nvSpPr>
+        <p:spPr/>
+        <p:txBody>
+          <a:bodyPr/>
+          <a:lstStyle/>
+          <a:p>
+            <a:r>
+              <a:rPr lang="en-US" dirty="0"/>
+              <a:t/>
+            </a:r>
+            <a:endParaRPr lang="en-US" dirty="0"/>
+          </a:p>
+        </p:txBody>
+      </p:sp>
+      <p:sp>
+        <p:nvSpPr>
+          <p:cNvPr id="4" name="Slide Number Placeholder 3"/>
+          <p:cNvSpPr>
+            <a:spLocks noGrp="1"/>
+          </p:cNvSpPr>
+          <p:nvPr>
+            <p:ph type="sldNum" sz="quarter" idx="10"/>
+          </p:nvPr>
+        </p:nvSpPr>
+        <p:spPr/>
+        <p:txBody>
+          <a:bodyPr/>
+          <a:lstStyle/>
+          <a:p>
+            <a:fld id="{F7021451-1387-4CA6-816F-3879F97B5CBC}" type="slidenum">
+              <a:rPr lang="en-US"/>
+              <a:t>13</a:t>
             </a:fld>
             <a:endParaRPr lang="en-US"/>
           </a:p>
@@ -1965,102 +2143,6 @@
         </p:nvSpPr>
         <p:spPr>
           <a:xfrm>
-            <a:off x="406301" y="1223963"/>
-            <a:ext cx="8498026" cy="274290"/>
-          </a:xfrm>
-          <a:prstGeom prst="rect">
-            <a:avLst/>
-          </a:prstGeom>
-          <a:noFill/>
-          <a:ln/>
-        </p:spPr>
-        <p:txBody>
-          <a:bodyPr wrap="square" lIns="0" tIns="0" rIns="0" bIns="0" rtlCol="0" anchor="t"/>
-          <a:lstStyle/>
-          <a:p>
-            <a:pPr algn="l" indent="0" marL="0">
-              <a:lnSpc>
-                <a:spcPts val="2160"/>
-              </a:lnSpc>
-              <a:spcBef>
-                <a:spcPts val="600"/>
-              </a:spcBef>
-              <a:spcAft>
-                <a:spcPts val="800"/>
-              </a:spcAft>
-              <a:buNone/>
-            </a:pPr>
-            <a:r>
-              <a:rPr lang="en-US" sz="1800" b="1" dirty="0">
-                <a:solidFill>
-                  <a:srgbClr val="E07A5F"/>
-                </a:solidFill>
-                <a:latin typeface="Georgia" pitchFamily="34" charset="0"/>
-                <a:ea typeface="Georgia" pitchFamily="34" charset="-122"/>
-                <a:cs typeface="Georgia" pitchFamily="34" charset="-120"/>
-              </a:rPr>
-              <a:t>Goal</a:t>
-            </a:r>
-            <a:endParaRPr lang="en-US" sz="1800" dirty="0"/>
-          </a:p>
-        </p:txBody>
-      </p:sp>
-      <p:sp>
-        <p:nvSpPr>
-          <p:cNvPr id="6" name="Text 4"/>
-          <p:cNvSpPr/>
-          <p:nvPr/>
-        </p:nvSpPr>
-        <p:spPr>
-          <a:xfrm>
-            <a:off x="406301" y="1637854"/>
-            <a:ext cx="8498026" cy="213271"/>
-          </a:xfrm>
-          <a:prstGeom prst="rect">
-            <a:avLst/>
-          </a:prstGeom>
-          <a:noFill/>
-          <a:ln/>
-        </p:spPr>
-        <p:txBody>
-          <a:bodyPr wrap="square" lIns="0" tIns="0" rIns="0" bIns="0" rtlCol="0" anchor="t"/>
-          <a:lstStyle/>
-          <a:p>
-            <a:pPr algn="l" indent="0" marL="0">
-              <a:lnSpc>
-                <a:spcPts val="1680"/>
-              </a:lnSpc>
-              <a:spcBef>
-                <a:spcPts val="300"/>
-              </a:spcBef>
-              <a:spcAft>
-                <a:spcPts val="300"/>
-              </a:spcAft>
-              <a:buNone/>
-            </a:pPr>
-            <a:r>
-              <a:rPr lang="en-US" sz="1200" dirty="0">
-                <a:solidFill>
-                  <a:srgbClr val="2C2C2C"/>
-                </a:solidFill>
-                <a:latin typeface="Verdana" pitchFamily="34" charset="0"/>
-                <a:ea typeface="Verdana" pitchFamily="34" charset="-122"/>
-                <a:cs typeface="Verdana" pitchFamily="34" charset="-120"/>
-              </a:rPr>
-              <a:t>In pairs, children design (paper sketch + first prototype) their own "Make 10" game.</a:t>
-            </a:r>
-            <a:endParaRPr lang="en-US" sz="1200" dirty="0"/>
-          </a:p>
-        </p:txBody>
-      </p:sp>
-      <p:sp>
-        <p:nvSpPr>
-          <p:cNvPr id="7" name="Text 5"/>
-          <p:cNvSpPr/>
-          <p:nvPr/>
-        </p:nvSpPr>
-        <p:spPr>
-          <a:xfrm>
             <a:off x="406301" y="4434929"/>
             <a:ext cx="8498026" cy="213271"/>
           </a:xfrm>
@@ -2205,7 +2287,7 @@
                 <a:ea typeface="Georgia" pitchFamily="34" charset="-122"/>
                 <a:cs typeface="Georgia" pitchFamily="34" charset="-120"/>
               </a:rPr>
-              <a:t>Differentiation</a:t>
+              <a:t>Show + chant (2 min)</a:t>
             </a:r>
             <a:endParaRPr lang="en-US" sz="1800" dirty="0"/>
           </a:p>
@@ -2243,7 +2325,7 @@
               <a:buChar char="•"/>
             </a:pPr>
             <a:r>
-              <a:rPr lang="en-US" sz="1200" b="1" dirty="0">
+              <a:rPr lang="en-US" sz="1200" dirty="0">
                 <a:solidFill>
                   <a:srgbClr val="2C2C2C"/>
                 </a:solidFill>
@@ -2251,16 +2333,20 @@
                 <a:ea typeface="Verdana" pitchFamily="34" charset="-122"/>
                 <a:cs typeface="Verdana" pitchFamily="34" charset="-120"/>
               </a:rPr>
-              <a:t>Tier up:</a:t>
-            </a:r>
-            <a:pPr algn="l" indent="0" marL="0">
+              <a:t>2 pairs share their game idea aloud.</a:t>
+            </a:r>
+            <a:endParaRPr lang="en-US" sz="1200" dirty="0"/>
+          </a:p>
+          <a:p>
+            <a:pPr algn="l" marL="342900" indent="-342900">
               <a:lnSpc>
                 <a:spcPts val="1620"/>
               </a:lnSpc>
               <a:spcAft>
                 <a:spcPts val="300"/>
               </a:spcAft>
-              <a:buNone/>
+              <a:buSzPct val="100000"/>
+              <a:buChar char="•"/>
             </a:pPr>
             <a:r>
               <a:rPr lang="en-US" sz="1200" dirty="0">
@@ -2271,51 +2357,7 @@
                 <a:ea typeface="Verdana" pitchFamily="34" charset="-122"/>
                 <a:cs typeface="Verdana" pitchFamily="34" charset="-120"/>
               </a:rPr>
-              <a:t> Add a "twist" — what makes your game extra fun or tricky?</a:t>
-            </a:r>
-            <a:endParaRPr lang="en-US" sz="1200" dirty="0"/>
-          </a:p>
-          <a:p>
-            <a:pPr algn="l" marL="342900" indent="-342900">
-              <a:lnSpc>
-                <a:spcPts val="1620"/>
-              </a:lnSpc>
-              <a:spcAft>
-                <a:spcPts val="300"/>
-              </a:spcAft>
-              <a:buSzPct val="100000"/>
-              <a:buChar char="•"/>
-            </a:pPr>
-            <a:r>
-              <a:rPr lang="en-US" sz="1200" b="1" dirty="0">
-                <a:solidFill>
-                  <a:srgbClr val="2C2C2C"/>
-                </a:solidFill>
-                <a:latin typeface="Verdana" pitchFamily="34" charset="0"/>
-                <a:ea typeface="Verdana" pitchFamily="34" charset="-122"/>
-                <a:cs typeface="Verdana" pitchFamily="34" charset="-120"/>
-              </a:rPr>
-              <a:t>Tier down:</a:t>
-            </a:r>
-            <a:pPr algn="l" indent="0" marL="0">
-              <a:lnSpc>
-                <a:spcPts val="1620"/>
-              </a:lnSpc>
-              <a:spcAft>
-                <a:spcPts val="300"/>
-              </a:spcAft>
-              <a:buNone/>
-            </a:pPr>
-            <a:r>
-              <a:rPr lang="en-US" sz="1200" dirty="0">
-                <a:solidFill>
-                  <a:srgbClr val="2C2C2C"/>
-                </a:solidFill>
-                <a:latin typeface="Verdana" pitchFamily="34" charset="0"/>
-                <a:ea typeface="Verdana" pitchFamily="34" charset="-122"/>
-                <a:cs typeface="Verdana" pitchFamily="34" charset="-120"/>
-              </a:rPr>
-              <a:t> Adapt an existing game (snakes and ladders, but every step you say a 10-pair).</a:t>
+              <a:t>Daily chant.</a:t>
             </a:r>
             <a:endParaRPr lang="en-US" sz="1200" dirty="0"/>
           </a:p>
@@ -2473,7 +2515,7 @@
                 <a:ea typeface="Georgia" pitchFamily="34" charset="-122"/>
                 <a:cs typeface="Georgia" pitchFamily="34" charset="-120"/>
               </a:rPr>
-              <a:t>Teacher's quick notes</a:t>
+              <a:t>Homework</a:t>
             </a:r>
             <a:endParaRPr lang="en-US" sz="1800" dirty="0"/>
           </a:p>
@@ -2487,8 +2529,8 @@
         </p:nvSpPr>
         <p:spPr>
           <a:xfrm>
-            <a:off x="406301" y="870942"/>
-            <a:ext cx="8498026" cy="426541"/>
+            <a:off x="634901" y="883593"/>
+            <a:ext cx="8102798" cy="281880"/>
           </a:xfrm>
           <a:prstGeom prst="rect">
             <a:avLst/>
@@ -2500,17 +2542,15 @@
           <a:bodyPr wrap="square" lIns="0" tIns="0" rIns="0" bIns="0" rtlCol="0" anchor="t"/>
           <a:lstStyle/>
           <a:p>
-            <a:pPr algn="l" indent="0" marL="0">
-              <a:lnSpc>
-                <a:spcPts val="1680"/>
-              </a:lnSpc>
-              <a:spcBef>
-                <a:spcPts val="300"/>
-              </a:spcBef>
-              <a:spcAft>
-                <a:spcPts val="300"/>
-              </a:spcAft>
-              <a:buNone/>
+            <a:pPr algn="l" marL="342900" indent="-342900">
+              <a:lnSpc>
+                <a:spcPts val="1620"/>
+              </a:lnSpc>
+              <a:spcAft>
+                <a:spcPts val="300"/>
+              </a:spcAft>
+              <a:buSzPct val="100000"/>
+              <a:buChar char="•"/>
             </a:pPr>
             <a:r>
               <a:rPr lang="en-US" sz="1200" dirty="0">
@@ -2521,7 +2561,503 @@
                 <a:ea typeface="Verdana" pitchFamily="34" charset="-122"/>
                 <a:cs typeface="Verdana" pitchFamily="34" charset="-120"/>
               </a:rPr>
-              <a:t>– This is creative day. Don't over-direct. Wild ideas welcome. – If a pair is totally stuck, suggest: "modify Snakes and Ladders so every ladder requires a Make 10 answer."</a:t>
+              <a:t>Finish your game design at home tonight. Bring all materials tomorrow!</a:t>
+            </a:r>
+            <a:endParaRPr lang="en-US" sz="1200" dirty="0"/>
+          </a:p>
+        </p:txBody>
+      </p:sp>
+      <p:sp>
+        <p:nvSpPr>
+          <p:cNvPr id="5" name="Text 3"/>
+          <p:cNvSpPr/>
+          <p:nvPr/>
+        </p:nvSpPr>
+        <p:spPr>
+          <a:xfrm>
+            <a:off x="406301" y="4434929"/>
+            <a:ext cx="8498026" cy="213271"/>
+          </a:xfrm>
+          <a:prstGeom prst="rect">
+            <a:avLst/>
+          </a:prstGeom>
+          <a:noFill/>
+          <a:ln/>
+        </p:spPr>
+        <p:txBody>
+          <a:bodyPr wrap="square" lIns="0" tIns="0" rIns="0" bIns="0" rtlCol="0" anchor="t"/>
+          <a:lstStyle/>
+          <a:p>
+            <a:pPr algn="l" indent="0" marL="0">
+              <a:lnSpc>
+                <a:spcPts val="1680"/>
+              </a:lnSpc>
+              <a:spcBef>
+                <a:spcPts val="300"/>
+              </a:spcBef>
+              <a:spcAft>
+                <a:spcPts val="300"/>
+              </a:spcAft>
+              <a:buNone/>
+            </a:pPr>
+            <a:r>
+              <a:rPr lang="en-US" sz="1200" dirty="0">
+                <a:solidFill>
+                  <a:srgbClr val="2C2C2C"/>
+                </a:solidFill>
+                <a:latin typeface="Verdana" pitchFamily="34" charset="0"/>
+                <a:ea typeface="Verdana" pitchFamily="34" charset="-122"/>
+                <a:cs typeface="Verdana" pitchFamily="34" charset="-120"/>
+              </a:rPr>
+              <a:t>Primary ·  · IKS Curriculum</a:t>
+            </a:r>
+            <a:endParaRPr lang="en-US" sz="1200" dirty="0"/>
+          </a:p>
+        </p:txBody>
+      </p:sp>
+    </p:spTree>
+  </p:cSld>
+  <p:clrMapOvr>
+    <a:masterClrMapping/>
+  </p:clrMapOvr>
+</p:sld>
+</file>
+
+<file path=ppt/slides/slide12.xml><?xml version="1.0" encoding="utf-8"?>
+<p:sld xmlns:a="http://schemas.openxmlformats.org/drawingml/2006/main" xmlns:r="http://schemas.openxmlformats.org/officeDocument/2006/relationships" xmlns:p="http://schemas.openxmlformats.org/presentationml/2006/main">
+  <p:cSld name="Slide 12">
+    <p:bg>
+      <p:bgPr>
+        <a:solidFill>
+          <a:srgbClr val="FAF7F2"/>
+        </a:solidFill>
+      </p:bgPr>
+    </p:bg>
+    <p:spTree>
+      <p:nvGrpSpPr>
+        <p:cNvPr id="1" name=""/>
+        <p:cNvGrpSpPr/>
+        <p:nvPr/>
+      </p:nvGrpSpPr>
+      <p:grpSpPr>
+        <a:xfrm>
+          <a:off x="0" y="0"/>
+          <a:ext cx="0" cy="0"/>
+          <a:chOff x="0" y="0"/>
+          <a:chExt cx="0" cy="0"/>
+        </a:xfrm>
+      </p:grpSpPr>
+      <p:sp>
+        <p:nvSpPr>
+          <p:cNvPr id="2" name="Text 0"/>
+          <p:cNvSpPr/>
+          <p:nvPr/>
+        </p:nvSpPr>
+        <p:spPr>
+          <a:xfrm>
+            <a:off x="0" y="0"/>
+            <a:ext cx="9144000" cy="101501"/>
+          </a:xfrm>
+          <a:prstGeom prst="rect">
+            <a:avLst/>
+          </a:prstGeom>
+          <a:solidFill>
+            <a:srgbClr val="87A96B"/>
+          </a:solidFill>
+          <a:ln/>
+        </p:spPr>
+        <p:txBody>
+          <a:bodyPr wrap="square" rtlCol="0" anchor="ctr"/>
+          <a:lstStyle/>
+          <a:p>
+            <a:pPr indent="0" marL="0">
+              <a:buNone/>
+            </a:pPr>
+            <a:endParaRPr lang="en-US" dirty="0"/>
+          </a:p>
+        </p:txBody>
+      </p:sp>
+      <p:sp>
+        <p:nvSpPr>
+          <p:cNvPr id="3" name="Text 1"/>
+          <p:cNvSpPr/>
+          <p:nvPr/>
+        </p:nvSpPr>
+        <p:spPr>
+          <a:xfrm>
+            <a:off x="406301" y="457051"/>
+            <a:ext cx="8498026" cy="274290"/>
+          </a:xfrm>
+          <a:prstGeom prst="rect">
+            <a:avLst/>
+          </a:prstGeom>
+          <a:noFill/>
+          <a:ln/>
+        </p:spPr>
+        <p:txBody>
+          <a:bodyPr wrap="square" lIns="0" tIns="0" rIns="0" bIns="0" rtlCol="0" anchor="t"/>
+          <a:lstStyle/>
+          <a:p>
+            <a:pPr algn="l" indent="0" marL="0">
+              <a:lnSpc>
+                <a:spcPts val="2160"/>
+              </a:lnSpc>
+              <a:spcBef>
+                <a:spcPts val="600"/>
+              </a:spcBef>
+              <a:spcAft>
+                <a:spcPts val="800"/>
+              </a:spcAft>
+              <a:buNone/>
+            </a:pPr>
+            <a:r>
+              <a:rPr lang="en-US" sz="1800" b="1" dirty="0">
+                <a:solidFill>
+                  <a:srgbClr val="E07A5F"/>
+                </a:solidFill>
+                <a:latin typeface="Georgia" pitchFamily="34" charset="0"/>
+                <a:ea typeface="Georgia" pitchFamily="34" charset="-122"/>
+                <a:cs typeface="Georgia" pitchFamily="34" charset="-120"/>
+              </a:rPr>
+              <a:t>Differentiation</a:t>
+            </a:r>
+            <a:endParaRPr lang="en-US" sz="1800" dirty="0"/>
+          </a:p>
+        </p:txBody>
+      </p:sp>
+      <p:sp>
+        <p:nvSpPr>
+          <p:cNvPr id="4" name="Text 2"/>
+          <p:cNvSpPr/>
+          <p:nvPr/>
+        </p:nvSpPr>
+        <p:spPr>
+          <a:xfrm>
+            <a:off x="634901" y="883593"/>
+            <a:ext cx="8102798" cy="525661"/>
+          </a:xfrm>
+          <a:prstGeom prst="rect">
+            <a:avLst/>
+          </a:prstGeom>
+          <a:noFill/>
+          <a:ln/>
+        </p:spPr>
+        <p:txBody>
+          <a:bodyPr wrap="square" lIns="0" tIns="0" rIns="0" bIns="0" rtlCol="0" anchor="t"/>
+          <a:lstStyle/>
+          <a:p>
+            <a:pPr algn="l" marL="342900" indent="-342900">
+              <a:lnSpc>
+                <a:spcPts val="1620"/>
+              </a:lnSpc>
+              <a:spcAft>
+                <a:spcPts val="300"/>
+              </a:spcAft>
+              <a:buSzPct val="100000"/>
+              <a:buChar char="•"/>
+            </a:pPr>
+            <a:r>
+              <a:rPr lang="en-US" sz="1200" b="1" dirty="0">
+                <a:solidFill>
+                  <a:srgbClr val="2C2C2C"/>
+                </a:solidFill>
+                <a:latin typeface="Verdana" pitchFamily="34" charset="0"/>
+                <a:ea typeface="Verdana" pitchFamily="34" charset="-122"/>
+                <a:cs typeface="Verdana" pitchFamily="34" charset="-120"/>
+              </a:rPr>
+              <a:t>Tier up:</a:t>
+            </a:r>
+            <a:pPr algn="l" indent="0" marL="0">
+              <a:lnSpc>
+                <a:spcPts val="1620"/>
+              </a:lnSpc>
+              <a:spcAft>
+                <a:spcPts val="300"/>
+              </a:spcAft>
+              <a:buNone/>
+            </a:pPr>
+            <a:r>
+              <a:rPr lang="en-US" sz="1200" dirty="0">
+                <a:solidFill>
+                  <a:srgbClr val="2C2C2C"/>
+                </a:solidFill>
+                <a:latin typeface="Verdana" pitchFamily="34" charset="0"/>
+                <a:ea typeface="Verdana" pitchFamily="34" charset="-122"/>
+                <a:cs typeface="Verdana" pitchFamily="34" charset="-120"/>
+              </a:rPr>
+              <a:t> Add a "twist" — what makes your game extra fun or tricky?</a:t>
+            </a:r>
+            <a:endParaRPr lang="en-US" sz="1200" dirty="0"/>
+          </a:p>
+          <a:p>
+            <a:pPr algn="l" marL="342900" indent="-342900">
+              <a:lnSpc>
+                <a:spcPts val="1620"/>
+              </a:lnSpc>
+              <a:spcAft>
+                <a:spcPts val="300"/>
+              </a:spcAft>
+              <a:buSzPct val="100000"/>
+              <a:buChar char="•"/>
+            </a:pPr>
+            <a:r>
+              <a:rPr lang="en-US" sz="1200" b="1" dirty="0">
+                <a:solidFill>
+                  <a:srgbClr val="2C2C2C"/>
+                </a:solidFill>
+                <a:latin typeface="Verdana" pitchFamily="34" charset="0"/>
+                <a:ea typeface="Verdana" pitchFamily="34" charset="-122"/>
+                <a:cs typeface="Verdana" pitchFamily="34" charset="-120"/>
+              </a:rPr>
+              <a:t>Tier down:</a:t>
+            </a:r>
+            <a:pPr algn="l" indent="0" marL="0">
+              <a:lnSpc>
+                <a:spcPts val="1620"/>
+              </a:lnSpc>
+              <a:spcAft>
+                <a:spcPts val="300"/>
+              </a:spcAft>
+              <a:buNone/>
+            </a:pPr>
+            <a:r>
+              <a:rPr lang="en-US" sz="1200" dirty="0">
+                <a:solidFill>
+                  <a:srgbClr val="2C2C2C"/>
+                </a:solidFill>
+                <a:latin typeface="Verdana" pitchFamily="34" charset="0"/>
+                <a:ea typeface="Verdana" pitchFamily="34" charset="-122"/>
+                <a:cs typeface="Verdana" pitchFamily="34" charset="-120"/>
+              </a:rPr>
+              <a:t> Adapt an existing game (snakes and ladders, but every step you say a 10-pair).</a:t>
+            </a:r>
+            <a:endParaRPr lang="en-US" sz="1200" dirty="0"/>
+          </a:p>
+        </p:txBody>
+      </p:sp>
+      <p:sp>
+        <p:nvSpPr>
+          <p:cNvPr id="5" name="Text 3"/>
+          <p:cNvSpPr/>
+          <p:nvPr/>
+        </p:nvSpPr>
+        <p:spPr>
+          <a:xfrm>
+            <a:off x="406301" y="4434929"/>
+            <a:ext cx="8498026" cy="213271"/>
+          </a:xfrm>
+          <a:prstGeom prst="rect">
+            <a:avLst/>
+          </a:prstGeom>
+          <a:noFill/>
+          <a:ln/>
+        </p:spPr>
+        <p:txBody>
+          <a:bodyPr wrap="square" lIns="0" tIns="0" rIns="0" bIns="0" rtlCol="0" anchor="t"/>
+          <a:lstStyle/>
+          <a:p>
+            <a:pPr algn="l" indent="0" marL="0">
+              <a:lnSpc>
+                <a:spcPts val="1680"/>
+              </a:lnSpc>
+              <a:spcBef>
+                <a:spcPts val="300"/>
+              </a:spcBef>
+              <a:spcAft>
+                <a:spcPts val="300"/>
+              </a:spcAft>
+              <a:buNone/>
+            </a:pPr>
+            <a:r>
+              <a:rPr lang="en-US" sz="1200" dirty="0">
+                <a:solidFill>
+                  <a:srgbClr val="2C2C2C"/>
+                </a:solidFill>
+                <a:latin typeface="Verdana" pitchFamily="34" charset="0"/>
+                <a:ea typeface="Verdana" pitchFamily="34" charset="-122"/>
+                <a:cs typeface="Verdana" pitchFamily="34" charset="-120"/>
+              </a:rPr>
+              <a:t>Primary ·  · IKS Curriculum</a:t>
+            </a:r>
+            <a:endParaRPr lang="en-US" sz="1200" dirty="0"/>
+          </a:p>
+        </p:txBody>
+      </p:sp>
+    </p:spTree>
+  </p:cSld>
+  <p:clrMapOvr>
+    <a:masterClrMapping/>
+  </p:clrMapOvr>
+</p:sld>
+</file>
+
+<file path=ppt/slides/slide13.xml><?xml version="1.0" encoding="utf-8"?>
+<p:sld xmlns:a="http://schemas.openxmlformats.org/drawingml/2006/main" xmlns:r="http://schemas.openxmlformats.org/officeDocument/2006/relationships" xmlns:p="http://schemas.openxmlformats.org/presentationml/2006/main">
+  <p:cSld name="Slide 13">
+    <p:bg>
+      <p:bgPr>
+        <a:solidFill>
+          <a:srgbClr val="FAF7F2"/>
+        </a:solidFill>
+      </p:bgPr>
+    </p:bg>
+    <p:spTree>
+      <p:nvGrpSpPr>
+        <p:cNvPr id="1" name=""/>
+        <p:cNvGrpSpPr/>
+        <p:nvPr/>
+      </p:nvGrpSpPr>
+      <p:grpSpPr>
+        <a:xfrm>
+          <a:off x="0" y="0"/>
+          <a:ext cx="0" cy="0"/>
+          <a:chOff x="0" y="0"/>
+          <a:chExt cx="0" cy="0"/>
+        </a:xfrm>
+      </p:grpSpPr>
+      <p:sp>
+        <p:nvSpPr>
+          <p:cNvPr id="2" name="Text 0"/>
+          <p:cNvSpPr/>
+          <p:nvPr/>
+        </p:nvSpPr>
+        <p:spPr>
+          <a:xfrm>
+            <a:off x="0" y="0"/>
+            <a:ext cx="9144000" cy="101501"/>
+          </a:xfrm>
+          <a:prstGeom prst="rect">
+            <a:avLst/>
+          </a:prstGeom>
+          <a:solidFill>
+            <a:srgbClr val="87A96B"/>
+          </a:solidFill>
+          <a:ln/>
+        </p:spPr>
+        <p:txBody>
+          <a:bodyPr wrap="square" rtlCol="0" anchor="ctr"/>
+          <a:lstStyle/>
+          <a:p>
+            <a:pPr indent="0" marL="0">
+              <a:buNone/>
+            </a:pPr>
+            <a:endParaRPr lang="en-US" dirty="0"/>
+          </a:p>
+        </p:txBody>
+      </p:sp>
+      <p:sp>
+        <p:nvSpPr>
+          <p:cNvPr id="3" name="Text 1"/>
+          <p:cNvSpPr/>
+          <p:nvPr/>
+        </p:nvSpPr>
+        <p:spPr>
+          <a:xfrm>
+            <a:off x="406301" y="457051"/>
+            <a:ext cx="8498026" cy="274290"/>
+          </a:xfrm>
+          <a:prstGeom prst="rect">
+            <a:avLst/>
+          </a:prstGeom>
+          <a:noFill/>
+          <a:ln/>
+        </p:spPr>
+        <p:txBody>
+          <a:bodyPr wrap="square" lIns="0" tIns="0" rIns="0" bIns="0" rtlCol="0" anchor="t"/>
+          <a:lstStyle/>
+          <a:p>
+            <a:pPr algn="l" indent="0" marL="0">
+              <a:lnSpc>
+                <a:spcPts val="2160"/>
+              </a:lnSpc>
+              <a:spcBef>
+                <a:spcPts val="600"/>
+              </a:spcBef>
+              <a:spcAft>
+                <a:spcPts val="800"/>
+              </a:spcAft>
+              <a:buNone/>
+            </a:pPr>
+            <a:r>
+              <a:rPr lang="en-US" sz="1800" b="1" dirty="0">
+                <a:solidFill>
+                  <a:srgbClr val="E07A5F"/>
+                </a:solidFill>
+                <a:latin typeface="Georgia" pitchFamily="34" charset="0"/>
+                <a:ea typeface="Georgia" pitchFamily="34" charset="-122"/>
+                <a:cs typeface="Georgia" pitchFamily="34" charset="-120"/>
+              </a:rPr>
+              <a:t>Teacher's quick notes</a:t>
+            </a:r>
+            <a:endParaRPr lang="en-US" sz="1800" dirty="0"/>
+          </a:p>
+        </p:txBody>
+      </p:sp>
+      <p:sp>
+        <p:nvSpPr>
+          <p:cNvPr id="4" name="Text 2"/>
+          <p:cNvSpPr/>
+          <p:nvPr/>
+        </p:nvSpPr>
+        <p:spPr>
+          <a:xfrm>
+            <a:off x="634901" y="883593"/>
+            <a:ext cx="8102798" cy="731341"/>
+          </a:xfrm>
+          <a:prstGeom prst="rect">
+            <a:avLst/>
+          </a:prstGeom>
+          <a:noFill/>
+          <a:ln/>
+        </p:spPr>
+        <p:txBody>
+          <a:bodyPr wrap="square" lIns="0" tIns="0" rIns="0" bIns="0" rtlCol="0" anchor="t"/>
+          <a:lstStyle/>
+          <a:p>
+            <a:pPr algn="l" marL="342900" indent="-342900">
+              <a:lnSpc>
+                <a:spcPts val="1620"/>
+              </a:lnSpc>
+              <a:spcAft>
+                <a:spcPts val="300"/>
+              </a:spcAft>
+              <a:buSzPct val="100000"/>
+              <a:buChar char="•"/>
+            </a:pPr>
+            <a:r>
+              <a:rPr lang="en-US" sz="1200" dirty="0">
+                <a:solidFill>
+                  <a:srgbClr val="2C2C2C"/>
+                </a:solidFill>
+                <a:latin typeface="Verdana" pitchFamily="34" charset="0"/>
+                <a:ea typeface="Verdana" pitchFamily="34" charset="-122"/>
+                <a:cs typeface="Verdana" pitchFamily="34" charset="-120"/>
+              </a:rPr>
+              <a:t>This is creative day. Don't over-direct. Wild ideas welcome.</a:t>
+            </a:r>
+            <a:endParaRPr lang="en-US" sz="1200" dirty="0"/>
+          </a:p>
+          <a:p>
+            <a:pPr algn="l" marL="342900" indent="-342900">
+              <a:lnSpc>
+                <a:spcPts val="1620"/>
+              </a:lnSpc>
+              <a:spcAft>
+                <a:spcPts val="300"/>
+              </a:spcAft>
+              <a:buSzPct val="100000"/>
+              <a:buChar char="•"/>
+            </a:pPr>
+            <a:r>
+              <a:rPr lang="en-US" sz="1200" dirty="0">
+                <a:solidFill>
+                  <a:srgbClr val="2C2C2C"/>
+                </a:solidFill>
+                <a:latin typeface="Verdana" pitchFamily="34" charset="0"/>
+                <a:ea typeface="Verdana" pitchFamily="34" charset="-122"/>
+                <a:cs typeface="Verdana" pitchFamily="34" charset="-120"/>
+              </a:rPr>
+              <a:t>If a pair is totally stuck, suggest: "modify Snakes and Ladders so every ladder requires a Make 10 answer."</a:t>
             </a:r>
             <a:endParaRPr lang="en-US" sz="1200" dirty="0"/>
           </a:p>
@@ -2679,7 +3215,7 @@
                 <a:ea typeface="Georgia" pitchFamily="34" charset="-122"/>
                 <a:cs typeface="Georgia" pitchFamily="34" charset="-120"/>
               </a:rPr>
-              <a:t>Materials</a:t>
+              <a:t>Goal</a:t>
             </a:r>
             <a:endParaRPr lang="en-US" sz="1800" dirty="0"/>
           </a:p>
@@ -2727,7 +3263,7 @@
                 <a:ea typeface="Verdana" pitchFamily="34" charset="-122"/>
                 <a:cs typeface="Verdana" pitchFamily="34" charset="-120"/>
               </a:rPr>
-              <a:t>– Drawing paper, markers – Spare cards, dice, counters</a:t>
+              <a:t>In pairs, children design (paper sketch + first prototype) their own "Make 10" game.</a:t>
             </a:r>
             <a:endParaRPr lang="en-US" sz="1200" dirty="0"/>
           </a:p>
@@ -2885,7 +3421,7 @@
                 <a:ea typeface="Georgia" pitchFamily="34" charset="-122"/>
                 <a:cs typeface="Georgia" pitchFamily="34" charset="-120"/>
               </a:rPr>
-              <a:t>The flow</a:t>
+              <a:t>Materials</a:t>
             </a:r>
             <a:endParaRPr lang="en-US" sz="1800" dirty="0"/>
           </a:p>
@@ -2894,6 +3430,76 @@
       <p:sp>
         <p:nvSpPr>
           <p:cNvPr id="4" name="Text 2"/>
+          <p:cNvSpPr/>
+          <p:nvPr/>
+        </p:nvSpPr>
+        <p:spPr>
+          <a:xfrm>
+            <a:off x="634901" y="883593"/>
+            <a:ext cx="8102798" cy="525661"/>
+          </a:xfrm>
+          <a:prstGeom prst="rect">
+            <a:avLst/>
+          </a:prstGeom>
+          <a:noFill/>
+          <a:ln/>
+        </p:spPr>
+        <p:txBody>
+          <a:bodyPr wrap="square" lIns="0" tIns="0" rIns="0" bIns="0" rtlCol="0" anchor="t"/>
+          <a:lstStyle/>
+          <a:p>
+            <a:pPr algn="l" marL="342900" indent="-342900">
+              <a:lnSpc>
+                <a:spcPts val="1620"/>
+              </a:lnSpc>
+              <a:spcAft>
+                <a:spcPts val="300"/>
+              </a:spcAft>
+              <a:buSzPct val="100000"/>
+              <a:buChar char="•"/>
+            </a:pPr>
+            <a:r>
+              <a:rPr lang="en-US" sz="1200" dirty="0">
+                <a:solidFill>
+                  <a:srgbClr val="2C2C2C"/>
+                </a:solidFill>
+                <a:latin typeface="Verdana" pitchFamily="34" charset="0"/>
+                <a:ea typeface="Verdana" pitchFamily="34" charset="-122"/>
+                <a:cs typeface="Verdana" pitchFamily="34" charset="-120"/>
+              </a:rPr>
+              <a:t>Drawing paper, markers</a:t>
+            </a:r>
+            <a:endParaRPr lang="en-US" sz="1200" dirty="0"/>
+          </a:p>
+          <a:p>
+            <a:pPr algn="l" marL="342900" indent="-342900">
+              <a:lnSpc>
+                <a:spcPts val="1620"/>
+              </a:lnSpc>
+              <a:spcAft>
+                <a:spcPts val="300"/>
+              </a:spcAft>
+              <a:buSzPct val="100000"/>
+              <a:buChar char="•"/>
+            </a:pPr>
+            <a:r>
+              <a:rPr lang="en-US" sz="1200" dirty="0">
+                <a:solidFill>
+                  <a:srgbClr val="2C2C2C"/>
+                </a:solidFill>
+                <a:latin typeface="Verdana" pitchFamily="34" charset="0"/>
+                <a:ea typeface="Verdana" pitchFamily="34" charset="-122"/>
+                <a:cs typeface="Verdana" pitchFamily="34" charset="-120"/>
+              </a:rPr>
+              <a:t>Spare cards, dice, counters</a:t>
+            </a:r>
+            <a:endParaRPr lang="en-US" sz="1200" dirty="0"/>
+          </a:p>
+        </p:txBody>
+      </p:sp>
+      <p:sp>
+        <p:nvSpPr>
+          <p:cNvPr id="5" name="Text 3"/>
           <p:cNvSpPr/>
           <p:nvPr/>
         </p:nvSpPr>
@@ -3043,7 +3649,7 @@
                 <a:ea typeface="Georgia" pitchFamily="34" charset="-122"/>
                 <a:cs typeface="Georgia" pitchFamily="34" charset="-120"/>
               </a:rPr>
-              <a:t>Settle + chant (5 min)</a:t>
+              <a:t>The flow</a:t>
             </a:r>
             <a:endParaRPr lang="en-US" sz="1800" dirty="0"/>
           </a:p>
@@ -3201,7 +3807,7 @@
                 <a:ea typeface="Georgia" pitchFamily="34" charset="-122"/>
                 <a:cs typeface="Georgia" pitchFamily="34" charset="-120"/>
               </a:rPr>
-              <a:t>Inspiration (5 min)</a:t>
+              <a:t>Settle + chant (5 min)</a:t>
             </a:r>
             <a:endParaRPr lang="en-US" sz="1800" dirty="0"/>
           </a:p>
@@ -3210,148 +3816,6 @@
       <p:sp>
         <p:nvSpPr>
           <p:cNvPr id="4" name="Text 2"/>
-          <p:cNvSpPr/>
-          <p:nvPr/>
-        </p:nvSpPr>
-        <p:spPr>
-          <a:xfrm>
-            <a:off x="634901" y="883593"/>
-            <a:ext cx="8102798" cy="487561"/>
-          </a:xfrm>
-          <a:prstGeom prst="rect">
-            <a:avLst/>
-          </a:prstGeom>
-          <a:noFill/>
-          <a:ln/>
-        </p:spPr>
-        <p:txBody>
-          <a:bodyPr wrap="square" lIns="0" tIns="0" rIns="0" bIns="0" rtlCol="0" anchor="t"/>
-          <a:lstStyle/>
-          <a:p>
-            <a:pPr algn="l" marL="342900" indent="-342900">
-              <a:lnSpc>
-                <a:spcPts val="1620"/>
-              </a:lnSpc>
-              <a:spcAft>
-                <a:spcPts val="300"/>
-              </a:spcAft>
-              <a:buSzPct val="100000"/>
-              <a:buChar char="•"/>
-            </a:pPr>
-            <a:r>
-              <a:rPr lang="en-US" sz="1200" i="1" dirty="0">
-                <a:solidFill>
-                  <a:srgbClr val="2C2C2C"/>
-                </a:solidFill>
-                <a:latin typeface="Verdana" pitchFamily="34" charset="0"/>
-                <a:ea typeface="Verdana" pitchFamily="34" charset="-122"/>
-                <a:cs typeface="Verdana" pitchFamily="34" charset="-120"/>
-              </a:rPr>
-              <a:t>"You've played lots of games this week. Now YOU design one. Your game must include the 'Make 10' idea — somehow."</a:t>
-            </a:r>
-            <a:endParaRPr lang="en-US" sz="1200" dirty="0"/>
-          </a:p>
-        </p:txBody>
-      </p:sp>
-      <p:sp>
-        <p:nvSpPr>
-          <p:cNvPr id="5" name="Text 3"/>
-          <p:cNvSpPr/>
-          <p:nvPr/>
-        </p:nvSpPr>
-        <p:spPr>
-          <a:xfrm>
-            <a:off x="406301" y="1460004"/>
-            <a:ext cx="8498026" cy="213271"/>
-          </a:xfrm>
-          <a:prstGeom prst="rect">
-            <a:avLst/>
-          </a:prstGeom>
-          <a:noFill/>
-          <a:ln/>
-        </p:spPr>
-        <p:txBody>
-          <a:bodyPr wrap="square" lIns="0" tIns="0" rIns="0" bIns="0" rtlCol="0" anchor="t"/>
-          <a:lstStyle/>
-          <a:p>
-            <a:pPr algn="l" indent="0" marL="0">
-              <a:lnSpc>
-                <a:spcPts val="1680"/>
-              </a:lnSpc>
-              <a:spcBef>
-                <a:spcPts val="300"/>
-              </a:spcBef>
-              <a:spcAft>
-                <a:spcPts val="300"/>
-              </a:spcAft>
-              <a:buNone/>
-            </a:pPr>
-            <a:r>
-              <a:rPr lang="en-US" sz="1200" dirty="0">
-                <a:solidFill>
-                  <a:srgbClr val="2C2C2C"/>
-                </a:solidFill>
-                <a:latin typeface="Verdana" pitchFamily="34" charset="0"/>
-                <a:ea typeface="Verdana" pitchFamily="34" charset="-122"/>
-                <a:cs typeface="Verdana" pitchFamily="34" charset="-120"/>
-              </a:rPr>
-              <a:t>– Quick brainstorm. Take 5 student ideas. Write on board.</a:t>
-            </a:r>
-            <a:endParaRPr lang="en-US" sz="1200" dirty="0"/>
-          </a:p>
-        </p:txBody>
-      </p:sp>
-      <p:sp>
-        <p:nvSpPr>
-          <p:cNvPr id="6" name="Text 4"/>
-          <p:cNvSpPr/>
-          <p:nvPr/>
-        </p:nvSpPr>
-        <p:spPr>
-          <a:xfrm>
-            <a:off x="406301" y="1749475"/>
-            <a:ext cx="8498026" cy="426541"/>
-          </a:xfrm>
-          <a:prstGeom prst="rect">
-            <a:avLst/>
-          </a:prstGeom>
-          <a:noFill/>
-          <a:ln/>
-        </p:spPr>
-        <p:txBody>
-          <a:bodyPr wrap="square" lIns="0" tIns="0" rIns="0" bIns="0" rtlCol="0" anchor="t"/>
-          <a:lstStyle/>
-          <a:p>
-            <a:pPr algn="l" indent="0" marL="0">
-              <a:lnSpc>
-                <a:spcPts val="1680"/>
-              </a:lnSpc>
-              <a:spcBef>
-                <a:spcPts val="300"/>
-              </a:spcBef>
-              <a:spcAft>
-                <a:spcPts val="300"/>
-              </a:spcAft>
-              <a:buNone/>
-            </a:pPr>
-            <a:r>
-              <a:rPr lang="en-US" sz="1200" dirty="0">
-                <a:solidFill>
-                  <a:srgbClr val="2C2C2C"/>
-                </a:solidFill>
-                <a:latin typeface="Verdana" pitchFamily="34" charset="0"/>
-                <a:ea typeface="Verdana" pitchFamily="34" charset="-122"/>
-                <a:cs typeface="Verdana" pitchFamily="34" charset="-120"/>
-              </a:rPr>
-              <a:t>Examples: – A card game where you collect pairs – A board game with "Make 10" squares – A jumping game where you jump to the number that makes 10 – A hide-and-seek game with number cards</a:t>
-            </a:r>
-            <a:endParaRPr lang="en-US" sz="1200" dirty="0"/>
-          </a:p>
-        </p:txBody>
-      </p:sp>
-      <p:sp>
-        <p:nvSpPr>
-          <p:cNvPr id="7" name="Text 5"/>
           <p:cNvSpPr/>
           <p:nvPr/>
         </p:nvSpPr>
@@ -3501,7 +3965,7 @@
                 <a:ea typeface="Georgia" pitchFamily="34" charset="-122"/>
                 <a:cs typeface="Georgia" pitchFamily="34" charset="-120"/>
               </a:rPr>
-              <a:t>Design + sketch (15 min)</a:t>
+              <a:t>Inspiration (5 min)</a:t>
             </a:r>
             <a:endParaRPr lang="en-US" sz="1800" dirty="0"/>
           </a:p>
@@ -3515,8 +3979,8 @@
         </p:nvSpPr>
         <p:spPr>
           <a:xfrm>
-            <a:off x="406301" y="870942"/>
-            <a:ext cx="8498026" cy="426541"/>
+            <a:off x="634901" y="883593"/>
+            <a:ext cx="8102798" cy="731341"/>
           </a:xfrm>
           <a:prstGeom prst="rect">
             <a:avLst/>
@@ -3528,20 +3992,18 @@
           <a:bodyPr wrap="square" lIns="0" tIns="0" rIns="0" bIns="0" rtlCol="0" anchor="t"/>
           <a:lstStyle/>
           <a:p>
-            <a:pPr algn="l" indent="0" marL="0">
-              <a:lnSpc>
-                <a:spcPts val="1680"/>
-              </a:lnSpc>
-              <a:spcBef>
-                <a:spcPts val="300"/>
-              </a:spcBef>
-              <a:spcAft>
-                <a:spcPts val="300"/>
-              </a:spcAft>
-              <a:buNone/>
-            </a:pPr>
-            <a:r>
-              <a:rPr lang="en-US" sz="1200" dirty="0">
+            <a:pPr algn="l" marL="342900" indent="-342900">
+              <a:lnSpc>
+                <a:spcPts val="1620"/>
+              </a:lnSpc>
+              <a:spcAft>
+                <a:spcPts val="300"/>
+              </a:spcAft>
+              <a:buSzPct val="100000"/>
+              <a:buChar char="•"/>
+            </a:pPr>
+            <a:r>
+              <a:rPr lang="en-US" sz="1200" i="1" dirty="0">
                 <a:solidFill>
                   <a:srgbClr val="2C2C2C"/>
                 </a:solidFill>
@@ -3549,7 +4011,31 @@
                 <a:ea typeface="Verdana" pitchFamily="34" charset="-122"/>
                 <a:cs typeface="Verdana" pitchFamily="34" charset="-120"/>
               </a:rPr>
-              <a:t>– Pairs decide on ONE game. – Sketch the game on paper: rules, what you need, how to win. – Make a quick prototype if possible.</a:t>
+              <a:t>"You've played lots of games this week. Now YOU design one. Your game must include the 'Make 10' idea — somehow."</a:t>
+            </a:r>
+            <a:endParaRPr lang="en-US" sz="1200" dirty="0"/>
+          </a:p>
+          <a:p>
+            <a:pPr algn="l" marL="342900" indent="-342900">
+              <a:lnSpc>
+                <a:spcPts val="1620"/>
+              </a:lnSpc>
+              <a:spcAft>
+                <a:spcPts val="300"/>
+              </a:spcAft>
+              <a:buSzPct val="100000"/>
+              <a:buChar char="•"/>
+            </a:pPr>
+            <a:r>
+              <a:rPr lang="en-US" sz="1200" dirty="0">
+                <a:solidFill>
+                  <a:srgbClr val="2C2C2C"/>
+                </a:solidFill>
+                <a:latin typeface="Verdana" pitchFamily="34" charset="0"/>
+                <a:ea typeface="Verdana" pitchFamily="34" charset="-122"/>
+                <a:cs typeface="Verdana" pitchFamily="34" charset="-120"/>
+              </a:rPr>
+              <a:t>Quick brainstorm. Take 5 student ideas. Write on board.</a:t>
             </a:r>
             <a:endParaRPr lang="en-US" sz="1200" dirty="0"/>
           </a:p>
@@ -3707,7 +4193,7 @@
                 <a:ea typeface="Georgia" pitchFamily="34" charset="-122"/>
                 <a:cs typeface="Georgia" pitchFamily="34" charset="-120"/>
               </a:rPr>
-              <a:t>Test it (8 min)</a:t>
+              <a:t>Inspiration (5 min) (cont.)</a:t>
             </a:r>
             <a:endParaRPr lang="en-US" sz="1800" dirty="0"/>
           </a:p>
@@ -3755,7 +4241,7 @@
                 <a:ea typeface="Verdana" pitchFamily="34" charset="-122"/>
                 <a:cs typeface="Verdana" pitchFamily="34" charset="-120"/>
               </a:rPr>
-              <a:t>– Each pair tries to play their own game once. Notice what works and what doesn't.</a:t>
+              <a:t>Examples:</a:t>
             </a:r>
             <a:endParaRPr lang="en-US" sz="1200" dirty="0"/>
           </a:p>
@@ -3764,6 +4250,124 @@
       <p:sp>
         <p:nvSpPr>
           <p:cNvPr id="5" name="Text 3"/>
+          <p:cNvSpPr/>
+          <p:nvPr/>
+        </p:nvSpPr>
+        <p:spPr>
+          <a:xfrm>
+            <a:off x="634901" y="1173063"/>
+            <a:ext cx="8102798" cy="1013222"/>
+          </a:xfrm>
+          <a:prstGeom prst="rect">
+            <a:avLst/>
+          </a:prstGeom>
+          <a:noFill/>
+          <a:ln/>
+        </p:spPr>
+        <p:txBody>
+          <a:bodyPr wrap="square" lIns="0" tIns="0" rIns="0" bIns="0" rtlCol="0" anchor="t"/>
+          <a:lstStyle/>
+          <a:p>
+            <a:pPr algn="l" marL="342900" indent="-342900">
+              <a:lnSpc>
+                <a:spcPts val="1620"/>
+              </a:lnSpc>
+              <a:spcAft>
+                <a:spcPts val="300"/>
+              </a:spcAft>
+              <a:buSzPct val="100000"/>
+              <a:buChar char="•"/>
+            </a:pPr>
+            <a:r>
+              <a:rPr lang="en-US" sz="1200" dirty="0">
+                <a:solidFill>
+                  <a:srgbClr val="2C2C2C"/>
+                </a:solidFill>
+                <a:latin typeface="Verdana" pitchFamily="34" charset="0"/>
+                <a:ea typeface="Verdana" pitchFamily="34" charset="-122"/>
+                <a:cs typeface="Verdana" pitchFamily="34" charset="-120"/>
+              </a:rPr>
+              <a:t>A card game where you collect pairs</a:t>
+            </a:r>
+            <a:endParaRPr lang="en-US" sz="1200" dirty="0"/>
+          </a:p>
+          <a:p>
+            <a:pPr algn="l" marL="342900" indent="-342900">
+              <a:lnSpc>
+                <a:spcPts val="1620"/>
+              </a:lnSpc>
+              <a:spcAft>
+                <a:spcPts val="300"/>
+              </a:spcAft>
+              <a:buSzPct val="100000"/>
+              <a:buChar char="•"/>
+            </a:pPr>
+            <a:r>
+              <a:rPr lang="en-US" sz="1200" dirty="0">
+                <a:solidFill>
+                  <a:srgbClr val="2C2C2C"/>
+                </a:solidFill>
+                <a:latin typeface="Verdana" pitchFamily="34" charset="0"/>
+                <a:ea typeface="Verdana" pitchFamily="34" charset="-122"/>
+                <a:cs typeface="Verdana" pitchFamily="34" charset="-120"/>
+              </a:rPr>
+              <a:t>A board game with "Make 10" squares</a:t>
+            </a:r>
+            <a:endParaRPr lang="en-US" sz="1200" dirty="0"/>
+          </a:p>
+          <a:p>
+            <a:pPr algn="l" marL="342900" indent="-342900">
+              <a:lnSpc>
+                <a:spcPts val="1620"/>
+              </a:lnSpc>
+              <a:spcAft>
+                <a:spcPts val="300"/>
+              </a:spcAft>
+              <a:buSzPct val="100000"/>
+              <a:buChar char="•"/>
+            </a:pPr>
+            <a:r>
+              <a:rPr lang="en-US" sz="1200" dirty="0">
+                <a:solidFill>
+                  <a:srgbClr val="2C2C2C"/>
+                </a:solidFill>
+                <a:latin typeface="Verdana" pitchFamily="34" charset="0"/>
+                <a:ea typeface="Verdana" pitchFamily="34" charset="-122"/>
+                <a:cs typeface="Verdana" pitchFamily="34" charset="-120"/>
+              </a:rPr>
+              <a:t>A jumping game where you jump to the number that makes 10</a:t>
+            </a:r>
+            <a:endParaRPr lang="en-US" sz="1200" dirty="0"/>
+          </a:p>
+          <a:p>
+            <a:pPr algn="l" marL="342900" indent="-342900">
+              <a:lnSpc>
+                <a:spcPts val="1620"/>
+              </a:lnSpc>
+              <a:spcAft>
+                <a:spcPts val="300"/>
+              </a:spcAft>
+              <a:buSzPct val="100000"/>
+              <a:buChar char="•"/>
+            </a:pPr>
+            <a:r>
+              <a:rPr lang="en-US" sz="1200" dirty="0">
+                <a:solidFill>
+                  <a:srgbClr val="2C2C2C"/>
+                </a:solidFill>
+                <a:latin typeface="Verdana" pitchFamily="34" charset="0"/>
+                <a:ea typeface="Verdana" pitchFamily="34" charset="-122"/>
+                <a:cs typeface="Verdana" pitchFamily="34" charset="-120"/>
+              </a:rPr>
+              <a:t>A hide-and-seek game with number cards</a:t>
+            </a:r>
+            <a:endParaRPr lang="en-US" sz="1200" dirty="0"/>
+          </a:p>
+        </p:txBody>
+      </p:sp>
+      <p:sp>
+        <p:nvSpPr>
+          <p:cNvPr id="6" name="Text 4"/>
           <p:cNvSpPr/>
           <p:nvPr/>
         </p:nvSpPr>
@@ -3913,7 +4517,7 @@
                 <a:ea typeface="Georgia" pitchFamily="34" charset="-122"/>
                 <a:cs typeface="Georgia" pitchFamily="34" charset="-120"/>
               </a:rPr>
-              <a:t>Show + chant (2 min)</a:t>
+              <a:t>Design + sketch (15 min)</a:t>
             </a:r>
             <a:endParaRPr lang="en-US" sz="1800" dirty="0"/>
           </a:p>
@@ -3927,8 +4531,8 @@
         </p:nvSpPr>
         <p:spPr>
           <a:xfrm>
-            <a:off x="406301" y="870942"/>
-            <a:ext cx="8498026" cy="213271"/>
+            <a:off x="634901" y="883593"/>
+            <a:ext cx="8102798" cy="769441"/>
           </a:xfrm>
           <a:prstGeom prst="rect">
             <a:avLst/>
@@ -3940,17 +4544,15 @@
           <a:bodyPr wrap="square" lIns="0" tIns="0" rIns="0" bIns="0" rtlCol="0" anchor="t"/>
           <a:lstStyle/>
           <a:p>
-            <a:pPr algn="l" indent="0" marL="0">
-              <a:lnSpc>
-                <a:spcPts val="1680"/>
-              </a:lnSpc>
-              <a:spcBef>
-                <a:spcPts val="300"/>
-              </a:spcBef>
-              <a:spcAft>
-                <a:spcPts val="300"/>
-              </a:spcAft>
-              <a:buNone/>
+            <a:pPr algn="l" marL="342900" indent="-342900">
+              <a:lnSpc>
+                <a:spcPts val="1620"/>
+              </a:lnSpc>
+              <a:spcAft>
+                <a:spcPts val="300"/>
+              </a:spcAft>
+              <a:buSzPct val="100000"/>
+              <a:buChar char="•"/>
             </a:pPr>
             <a:r>
               <a:rPr lang="en-US" sz="1200" dirty="0">
@@ -3961,7 +4563,55 @@
                 <a:ea typeface="Verdana" pitchFamily="34" charset="-122"/>
                 <a:cs typeface="Verdana" pitchFamily="34" charset="-120"/>
               </a:rPr>
-              <a:t>– 2 pairs share their game idea aloud. – Daily chant.</a:t>
+              <a:t>Pairs decide on ONE game.</a:t>
+            </a:r>
+            <a:endParaRPr lang="en-US" sz="1200" dirty="0"/>
+          </a:p>
+          <a:p>
+            <a:pPr algn="l" marL="342900" indent="-342900">
+              <a:lnSpc>
+                <a:spcPts val="1620"/>
+              </a:lnSpc>
+              <a:spcAft>
+                <a:spcPts val="300"/>
+              </a:spcAft>
+              <a:buSzPct val="100000"/>
+              <a:buChar char="•"/>
+            </a:pPr>
+            <a:r>
+              <a:rPr lang="en-US" sz="1200" dirty="0">
+                <a:solidFill>
+                  <a:srgbClr val="2C2C2C"/>
+                </a:solidFill>
+                <a:latin typeface="Verdana" pitchFamily="34" charset="0"/>
+                <a:ea typeface="Verdana" pitchFamily="34" charset="-122"/>
+                <a:cs typeface="Verdana" pitchFamily="34" charset="-120"/>
+              </a:rPr>
+              <a:t>Sketch the game on paper: rules, what you need, how to win.</a:t>
+            </a:r>
+            <a:endParaRPr lang="en-US" sz="1200" dirty="0"/>
+          </a:p>
+          <a:p>
+            <a:pPr algn="l" marL="342900" indent="-342900">
+              <a:lnSpc>
+                <a:spcPts val="1620"/>
+              </a:lnSpc>
+              <a:spcAft>
+                <a:spcPts val="300"/>
+              </a:spcAft>
+              <a:buSzPct val="100000"/>
+              <a:buChar char="•"/>
+            </a:pPr>
+            <a:r>
+              <a:rPr lang="en-US" sz="1200" dirty="0">
+                <a:solidFill>
+                  <a:srgbClr val="2C2C2C"/>
+                </a:solidFill>
+                <a:latin typeface="Verdana" pitchFamily="34" charset="0"/>
+                <a:ea typeface="Verdana" pitchFamily="34" charset="-122"/>
+                <a:cs typeface="Verdana" pitchFamily="34" charset="-120"/>
+              </a:rPr>
+              <a:t>Make a quick prototype if possible.</a:t>
             </a:r>
             <a:endParaRPr lang="en-US" sz="1200" dirty="0"/>
           </a:p>
@@ -4119,7 +4769,7 @@
                 <a:ea typeface="Georgia" pitchFamily="34" charset="-122"/>
                 <a:cs typeface="Georgia" pitchFamily="34" charset="-120"/>
               </a:rPr>
-              <a:t>Homework</a:t>
+              <a:t>Test it (8 min)</a:t>
             </a:r>
             <a:endParaRPr lang="en-US" sz="1800" dirty="0"/>
           </a:p>
@@ -4133,8 +4783,8 @@
         </p:nvSpPr>
         <p:spPr>
           <a:xfrm>
-            <a:off x="406301" y="870942"/>
-            <a:ext cx="8498026" cy="213271"/>
+            <a:off x="634901" y="883593"/>
+            <a:ext cx="8102798" cy="281880"/>
           </a:xfrm>
           <a:prstGeom prst="rect">
             <a:avLst/>
@@ -4146,17 +4796,15 @@
           <a:bodyPr wrap="square" lIns="0" tIns="0" rIns="0" bIns="0" rtlCol="0" anchor="t"/>
           <a:lstStyle/>
           <a:p>
-            <a:pPr algn="l" indent="0" marL="0">
-              <a:lnSpc>
-                <a:spcPts val="1680"/>
-              </a:lnSpc>
-              <a:spcBef>
-                <a:spcPts val="300"/>
-              </a:spcBef>
-              <a:spcAft>
-                <a:spcPts val="300"/>
-              </a:spcAft>
-              <a:buNone/>
+            <a:pPr algn="l" marL="342900" indent="-342900">
+              <a:lnSpc>
+                <a:spcPts val="1620"/>
+              </a:lnSpc>
+              <a:spcAft>
+                <a:spcPts val="300"/>
+              </a:spcAft>
+              <a:buSzPct val="100000"/>
+              <a:buChar char="•"/>
             </a:pPr>
             <a:r>
               <a:rPr lang="en-US" sz="1200" dirty="0">
@@ -4167,7 +4815,7 @@
                 <a:ea typeface="Verdana" pitchFamily="34" charset="-122"/>
                 <a:cs typeface="Verdana" pitchFamily="34" charset="-120"/>
               </a:rPr>
-              <a:t>– Finish your game design at home tonight. Bring all materials tomorrow!</a:t>
+              <a:t>Each pair tries to play their own game once. Notice what works and what doesn't.</a:t>
             </a:r>
             <a:endParaRPr lang="en-US" sz="1200" dirty="0"/>
           </a:p>
